--- a/google-drive/week02/2Tues/1_lasbest-hypothesis-testing.pptx
+++ b/google-drive/week02/2Tues/1_lasbest-hypothesis-testing.pptx
@@ -236,7 +236,7 @@
           <a:p>
             <a:fld id="{F3C7AE39-24BF-9046-BF66-BB2858E2304D}" type="datetimeFigureOut">
               <a:rPr lang="en-US" smtClean="0"/>
-              <a:t>6/24/24</a:t>
+              <a:t>6/24/25</a:t>
             </a:fld>
             <a:endParaRPr lang="en-US"/>
           </a:p>
@@ -413,7 +413,7 @@
           <a:p>
             <a:fld id="{ECC99FF1-95D4-D041-9B30-B541100C8263}" type="datetimeFigureOut">
               <a:rPr lang="en-US" smtClean="0"/>
-              <a:t>6/24/24</a:t>
+              <a:t>6/24/25</a:t>
             </a:fld>
             <a:endParaRPr lang="en-US"/>
           </a:p>
@@ -5357,8 +5357,8 @@
           </a:p>
         </p:txBody>
       </p:sp>
-      <mc:AlternateContent xmlns:mc="http://schemas.openxmlformats.org/markup-compatibility/2006">
-        <mc:Choice xmlns:a14="http://schemas.microsoft.com/office/drawing/2010/main" Requires="a14">
+      <mc:AlternateContent xmlns:mc="http://schemas.openxmlformats.org/markup-compatibility/2006" xmlns:a14="http://schemas.microsoft.com/office/drawing/2010/main">
+        <mc:Choice Requires="a14">
           <p:sp>
             <p:nvSpPr>
               <p:cNvPr id="7" name="TextBox 6">
@@ -5454,7 +5454,7 @@
             </p:txBody>
           </p:sp>
         </mc:Choice>
-        <mc:Fallback>
+        <mc:Fallback xmlns="">
           <p:sp>
             <p:nvSpPr>
               <p:cNvPr id="7" name="TextBox 6">
@@ -13526,7 +13526,7 @@
             </a:pPr>
             <a:r>
               <a:rPr lang="en-US" dirty="0"/>
-              <a:t>	HOWEVER, we can describe the circumstances under which a 	causal association could be inferred (Dr. Garcia’s lecture)</a:t>
+              <a:t>	HOWEVER, we can describe the circumstances under which a 	causal association could be inferred (Dr. Garcia’s lecture in July)</a:t>
             </a:r>
           </a:p>
         </p:txBody>
@@ -15866,7 +15866,7 @@
             </a:r>
             <a:r>
               <a:rPr lang="en-US" dirty="0"/>
-              <a:t> scientific (NS)</a:t>
+              <a:t> significant (NS)</a:t>
             </a:r>
           </a:p>
           <a:p>
@@ -16432,16 +16432,13 @@
           <a:p>
             <a:r>
               <a:rPr lang="en-US" dirty="0"/>
-              <a:t>Significance Level		       	probability of making the wrong 							decision when H</a:t>
+              <a:t>Significance Level		       	probability of rejecting H</a:t>
             </a:r>
             <a:r>
               <a:rPr lang="en-US" baseline="-25000" dirty="0"/>
               <a:t>0</a:t>
             </a:r>
-            <a:r>
-              <a:rPr lang="en-US" dirty="0"/>
-              <a:t> is true</a:t>
-            </a:r>
+            <a:endParaRPr lang="en-US" dirty="0"/>
           </a:p>
           <a:p>
             <a:pPr marL="0" indent="0">
@@ -16449,7 +16446,24 @@
             </a:pPr>
             <a:r>
               <a:rPr lang="en-US" dirty="0"/>
-              <a:t>						(fix by design) </a:t>
+              <a:t>						    when H</a:t>
+            </a:r>
+            <a:r>
+              <a:rPr lang="en-US" baseline="-25000" dirty="0"/>
+              <a:t>0</a:t>
+            </a:r>
+            <a:r>
+              <a:rPr lang="en-US" dirty="0"/>
+              <a:t> is true (error)</a:t>
+            </a:r>
+          </a:p>
+          <a:p>
+            <a:pPr marL="0" indent="0">
+              <a:buNone/>
+            </a:pPr>
+            <a:r>
+              <a:rPr lang="en-US" dirty="0"/>
+              <a:t>						fix by design </a:t>
             </a:r>
           </a:p>
         </p:txBody>
@@ -16697,6 +16711,55 @@
                                           <p:spTgt spid="4">
                                             <p:txEl>
                                               <p:pRg st="4" end="4"/>
+                                            </p:txEl>
+                                          </p:spTgt>
+                                        </p:tgtEl>
+                                        <p:attrNameLst>
+                                          <p:attrName>style.visibility</p:attrName>
+                                        </p:attrNameLst>
+                                      </p:cBhvr>
+                                      <p:to>
+                                        <p:strVal val="visible"/>
+                                      </p:to>
+                                    </p:set>
+                                  </p:childTnLst>
+                                </p:cTn>
+                              </p:par>
+                            </p:childTnLst>
+                          </p:cTn>
+                        </p:par>
+                      </p:childTnLst>
+                    </p:cTn>
+                  </p:par>
+                  <p:par>
+                    <p:cTn id="23" fill="hold">
+                      <p:stCondLst>
+                        <p:cond delay="indefinite"/>
+                      </p:stCondLst>
+                      <p:childTnLst>
+                        <p:par>
+                          <p:cTn id="24" fill="hold">
+                            <p:stCondLst>
+                              <p:cond delay="0"/>
+                            </p:stCondLst>
+                            <p:childTnLst>
+                              <p:par>
+                                <p:cTn id="25" presetID="1" presetClass="entr" presetSubtype="0" fill="hold" grpId="0" nodeType="clickEffect">
+                                  <p:stCondLst>
+                                    <p:cond delay="0"/>
+                                  </p:stCondLst>
+                                  <p:childTnLst>
+                                    <p:set>
+                                      <p:cBhvr>
+                                        <p:cTn id="26" dur="1" fill="hold">
+                                          <p:stCondLst>
+                                            <p:cond delay="0"/>
+                                          </p:stCondLst>
+                                        </p:cTn>
+                                        <p:tgtEl>
+                                          <p:spTgt spid="4">
+                                            <p:txEl>
+                                              <p:pRg st="5" end="5"/>
                                             </p:txEl>
                                           </p:spTgt>
                                         </p:tgtEl>

--- a/google-drive/week02/2Tues/1_lasbest-hypothesis-testing.pptx
+++ b/google-drive/week02/2Tues/1_lasbest-hypothesis-testing.pptx
@@ -16463,7 +16463,42 @@
             </a:pPr>
             <a:r>
               <a:rPr lang="en-US" dirty="0"/>
-              <a:t>						fix by design </a:t>
+              <a:t>						</a:t>
+            </a:r>
+          </a:p>
+        </p:txBody>
+      </p:sp>
+      <p:sp>
+        <p:nvSpPr>
+          <p:cNvPr id="3" name="TextBox 2">
+            <a:extLst>
+              <a:ext uri="{FF2B5EF4-FFF2-40B4-BE49-F238E27FC236}">
+                <a16:creationId xmlns:a16="http://schemas.microsoft.com/office/drawing/2014/main" id="{6EA32822-E5C5-254F-596D-8CCFFC69FCEA}"/>
+              </a:ext>
+            </a:extLst>
+          </p:cNvPr>
+          <p:cNvSpPr txBox="1"/>
+          <p:nvPr/>
+        </p:nvSpPr>
+        <p:spPr>
+          <a:xfrm>
+            <a:off x="1865871" y="3759950"/>
+            <a:ext cx="1779783" cy="461665"/>
+          </a:xfrm>
+          <a:prstGeom prst="rect">
+            <a:avLst/>
+          </a:prstGeom>
+          <a:noFill/>
+        </p:spPr>
+        <p:txBody>
+          <a:bodyPr wrap="none" rtlCol="0">
+            <a:spAutoFit/>
+          </a:bodyPr>
+          <a:lstStyle/>
+          <a:p>
+            <a:r>
+              <a:rPr lang="en-US" sz="2400" dirty="0"/>
+              <a:t>fix by design</a:t>
             </a:r>
           </a:p>
         </p:txBody>
@@ -16676,33 +16711,15 @@
                                   </p:childTnLst>
                                 </p:cTn>
                               </p:par>
-                            </p:childTnLst>
-                          </p:cTn>
-                        </p:par>
-                      </p:childTnLst>
-                    </p:cTn>
-                  </p:par>
-                  <p:par>
-                    <p:cTn id="19" fill="hold">
-                      <p:stCondLst>
-                        <p:cond delay="indefinite"/>
-                      </p:stCondLst>
-                      <p:childTnLst>
-                        <p:par>
-                          <p:cTn id="20" fill="hold">
-                            <p:stCondLst>
-                              <p:cond delay="0"/>
-                            </p:stCondLst>
-                            <p:childTnLst>
                               <p:par>
-                                <p:cTn id="21" presetID="1" presetClass="entr" presetSubtype="0" fill="hold" grpId="0" nodeType="clickEffect">
+                                <p:cTn id="19" presetID="1" presetClass="entr" presetSubtype="0" fill="hold" grpId="0" nodeType="withEffect">
                                   <p:stCondLst>
                                     <p:cond delay="0"/>
                                   </p:stCondLst>
                                   <p:childTnLst>
                                     <p:set>
                                       <p:cBhvr>
-                                        <p:cTn id="22" dur="1" fill="hold">
+                                        <p:cTn id="20" dur="1" fill="hold">
                                           <p:stCondLst>
                                             <p:cond delay="0"/>
                                           </p:stCondLst>
@@ -16725,43 +16742,21 @@
                                   </p:childTnLst>
                                 </p:cTn>
                               </p:par>
-                            </p:childTnLst>
-                          </p:cTn>
-                        </p:par>
-                      </p:childTnLst>
-                    </p:cTn>
-                  </p:par>
-                  <p:par>
-                    <p:cTn id="23" fill="hold">
-                      <p:stCondLst>
-                        <p:cond delay="indefinite"/>
-                      </p:stCondLst>
-                      <p:childTnLst>
-                        <p:par>
-                          <p:cTn id="24" fill="hold">
-                            <p:stCondLst>
-                              <p:cond delay="0"/>
-                            </p:stCondLst>
-                            <p:childTnLst>
                               <p:par>
-                                <p:cTn id="25" presetID="1" presetClass="entr" presetSubtype="0" fill="hold" grpId="0" nodeType="clickEffect">
+                                <p:cTn id="21" presetID="1" presetClass="entr" presetSubtype="0" fill="hold" grpId="0" nodeType="withEffect">
                                   <p:stCondLst>
                                     <p:cond delay="0"/>
                                   </p:stCondLst>
                                   <p:childTnLst>
                                     <p:set>
                                       <p:cBhvr>
-                                        <p:cTn id="26" dur="1" fill="hold">
+                                        <p:cTn id="22" dur="1" fill="hold">
                                           <p:stCondLst>
                                             <p:cond delay="0"/>
                                           </p:stCondLst>
                                         </p:cTn>
                                         <p:tgtEl>
-                                          <p:spTgt spid="4">
-                                            <p:txEl>
-                                              <p:pRg st="5" end="5"/>
-                                            </p:txEl>
-                                          </p:spTgt>
+                                          <p:spTgt spid="3"/>
                                         </p:tgtEl>
                                         <p:attrNameLst>
                                           <p:attrName>style.visibility</p:attrName>
@@ -16802,7 +16797,8 @@
       </p:par>
     </p:tnLst>
     <p:bldLst>
-      <p:bldP spid="4" grpId="0" build="p"/>
+      <p:bldP spid="4" grpId="0" uiExpand="1" build="p"/>
+      <p:bldP spid="3" grpId="0"/>
     </p:bldLst>
   </p:timing>
 </p:sld>
